--- a/handouts/woodlands-manual-workshop-20260918/deck/woodlands-manual-workshop.pptx
+++ b/handouts/woodlands-manual-workshop-20260918/deck/woodlands-manual-workshop.pptx
@@ -1125,7 +1125,7 @@
           <a:p/>
           <a:p>
             <a:r>
-              <a:t>1. Return to your learner folder in the `jdi-training-manual` workspace.</a:t>
+              <a:t>1. Return to your learner folder in the `fabric-training-manual` workspace.</a:t>
             </a:r>
           </a:p>
           <a:p>
@@ -1265,7 +1265,7 @@
           <a:p/>
           <a:p>
             <a:r>
-              <a:t>1. Return to your learner folder in the `jdi-training-manual` workspace.</a:t>
+              <a:t>1. Return to your learner folder in the `fabric-training-manual` workspace.</a:t>
             </a:r>
           </a:p>
           <a:p>
@@ -1472,7 +1472,7 @@
           </a:p>
           <a:p>
             <a:r>
-              <a:t>5. Select the `env_forestops` row whose **Location** is exactly `jdi-training-manual`,</a:t>
+              <a:t>5. Select the `env_forestops` row whose **Location** is exactly `fabric-training-manual`,</a:t>
             </a:r>
           </a:p>
           <a:p>
@@ -1492,7 +1492,7 @@
           </a:p>
           <a:p>
             <a:r>
-              <a:t>7. Filter to `lh_woodlands_demo`. Select the **Lakehouse** row in `jdi-training-manual`,</a:t>
+              <a:t>7. Filter to `lh_woodlands_demo`. Select the **Lakehouse** row in `fabric-training-manual`,</a:t>
             </a:r>
           </a:p>
           <a:p>
@@ -1542,7 +1542,7 @@
           </a:p>
           <a:p>
             <a:r>
-              <a:t>   `WORKSPACE = "jdi-training-manual"` and `LAKEHOUSE = "lh_woodlands_demo"`.</a:t>
+              <a:t>   `WORKSPACE = "fabric-training-manual"` and `LAKEHOUSE = "lh_woodlands_demo"`.</a:t>
             </a:r>
           </a:p>
           <a:p>
@@ -1553,7 +1553,7 @@
           <a:p/>
           <a:p>
             <a:r>
-              <a:t>![Choose env_forestops from the jdi-training-manual workspace.](images/training/manual/13-environment-picker.png)</a:t>
+              <a:t>![Choose env_forestops from the fabric-training-manual workspace.](images/training/manual/13-environment-picker.png)</a:t>
             </a:r>
           </a:p>
           <a:p/>
@@ -1741,7 +1741,7 @@
           </a:p>
           <a:p>
             <a:r>
-              <a:t>5. Select the `env_forestops` row whose **Location** is exactly `jdi-training-manual`,</a:t>
+              <a:t>5. Select the `env_forestops` row whose **Location** is exactly `fabric-training-manual`,</a:t>
             </a:r>
           </a:p>
           <a:p>
@@ -1761,7 +1761,7 @@
           </a:p>
           <a:p>
             <a:r>
-              <a:t>7. Filter to `lh_woodlands_demo`. Select the **Lakehouse** row in `jdi-training-manual`,</a:t>
+              <a:t>7. Filter to `lh_woodlands_demo`. Select the **Lakehouse** row in `fabric-training-manual`,</a:t>
             </a:r>
           </a:p>
           <a:p>
@@ -1811,7 +1811,7 @@
           </a:p>
           <a:p>
             <a:r>
-              <a:t>   `WORKSPACE = "jdi-training-manual"` and `LAKEHOUSE = "lh_woodlands_demo"`.</a:t>
+              <a:t>   `WORKSPACE = "fabric-training-manual"` and `LAKEHOUSE = "lh_woodlands_demo"`.</a:t>
             </a:r>
           </a:p>
           <a:p>
@@ -1822,7 +1822,7 @@
           <a:p/>
           <a:p>
             <a:r>
-              <a:t>![Choose env_forestops from the jdi-training-manual workspace.](images/training/manual/13-environment-picker.png)</a:t>
+              <a:t>![Choose env_forestops from the fabric-training-manual workspace.](images/training/manual/13-environment-picker.png)</a:t>
             </a:r>
           </a:p>
           <a:p/>
@@ -2010,7 +2010,7 @@
           </a:p>
           <a:p>
             <a:r>
-              <a:t>5. Select the `env_forestops` row whose **Location** is exactly `jdi-training-manual`,</a:t>
+              <a:t>5. Select the `env_forestops` row whose **Location** is exactly `fabric-training-manual`,</a:t>
             </a:r>
           </a:p>
           <a:p>
@@ -2030,7 +2030,7 @@
           </a:p>
           <a:p>
             <a:r>
-              <a:t>7. Filter to `lh_woodlands_demo`. Select the **Lakehouse** row in `jdi-training-manual`,</a:t>
+              <a:t>7. Filter to `lh_woodlands_demo`. Select the **Lakehouse** row in `fabric-training-manual`,</a:t>
             </a:r>
           </a:p>
           <a:p>
@@ -2080,7 +2080,7 @@
           </a:p>
           <a:p>
             <a:r>
-              <a:t>   `WORKSPACE = "jdi-training-manual"` and `LAKEHOUSE = "lh_woodlands_demo"`.</a:t>
+              <a:t>   `WORKSPACE = "fabric-training-manual"` and `LAKEHOUSE = "lh_woodlands_demo"`.</a:t>
             </a:r>
           </a:p>
           <a:p>
@@ -2091,7 +2091,7 @@
           <a:p/>
           <a:p>
             <a:r>
-              <a:t>![Choose env_forestops from the jdi-training-manual workspace.](images/training/manual/13-environment-picker.png)</a:t>
+              <a:t>![Choose env_forestops from the fabric-training-manual workspace.](images/training/manual/13-environment-picker.png)</a:t>
             </a:r>
           </a:p>
           <a:p/>
@@ -2279,7 +2279,7 @@
           </a:p>
           <a:p>
             <a:r>
-              <a:t>5. Select the `env_forestops` row whose **Location** is exactly `jdi-training-manual`,</a:t>
+              <a:t>5. Select the `env_forestops` row whose **Location** is exactly `fabric-training-manual`,</a:t>
             </a:r>
           </a:p>
           <a:p>
@@ -2299,7 +2299,7 @@
           </a:p>
           <a:p>
             <a:r>
-              <a:t>7. Filter to `lh_woodlands_demo`. Select the **Lakehouse** row in `jdi-training-manual`,</a:t>
+              <a:t>7. Filter to `lh_woodlands_demo`. Select the **Lakehouse** row in `fabric-training-manual`,</a:t>
             </a:r>
           </a:p>
           <a:p>
@@ -2349,7 +2349,7 @@
           </a:p>
           <a:p>
             <a:r>
-              <a:t>   `WORKSPACE = "jdi-training-manual"` and `LAKEHOUSE = "lh_woodlands_demo"`.</a:t>
+              <a:t>   `WORKSPACE = "fabric-training-manual"` and `LAKEHOUSE = "lh_woodlands_demo"`.</a:t>
             </a:r>
           </a:p>
           <a:p>
@@ -2360,7 +2360,7 @@
           <a:p/>
           <a:p>
             <a:r>
-              <a:t>![Choose env_forestops from the jdi-training-manual workspace.](images/training/manual/13-environment-picker.png)</a:t>
+              <a:t>![Choose env_forestops from the fabric-training-manual workspace.](images/training/manual/13-environment-picker.png)</a:t>
             </a:r>
           </a:p>
           <a:p/>
@@ -2656,7 +2656,7 @@
           </a:p>
           <a:p>
             <a:r>
-              <a:t>   `WORKSPACE="jdi-training-manual"` and your own lakehouse name.</a:t>
+              <a:t>   `WORKSPACE="fabric-training-manual"` and your own lakehouse name.</a:t>
             </a:r>
           </a:p>
           <a:p>
@@ -2832,7 +2832,7 @@
           </a:p>
           <a:p>
             <a:r>
-              <a:t>3. Select **Workspaces** &gt; **New workspace** and enter `jdi-training-manual`.</a:t>
+              <a:t>3. Select **Workspaces** &gt; **New workspace** and enter `fabric-training-manual`.</a:t>
             </a:r>
           </a:p>
           <a:p>
@@ -2852,7 +2852,7 @@
           </a:p>
           <a:p>
             <a:r>
-              <a:t>   the older `jdi-training` reference workspace and its items.</a:t>
+              <a:t>   the older `fabric-training` reference workspace and its items.</a:t>
             </a:r>
           </a:p>
           <a:p>
@@ -2913,7 +2913,7 @@
           <a:p/>
           <a:p>
             <a:r>
-              <a:t>![Name the facilitator workspace jdi-training-manual and open Advanced.](images/training/manual/01-workspace-create.png)</a:t>
+              <a:t>![Name the facilitator workspace fabric-training-manual and open Advanced.](images/training/manual/01-workspace-create.png)</a:t>
             </a:r>
           </a:p>
           <a:p/>
@@ -3033,7 +3033,7 @@
           </a:p>
           <a:p>
             <a:r>
-              <a:t>   `WORKSPACE="jdi-training-manual"` and your own lakehouse name.</a:t>
+              <a:t>   `WORKSPACE="fabric-training-manual"` and your own lakehouse name.</a:t>
             </a:r>
           </a:p>
           <a:p>
@@ -4546,7 +4546,7 @@
           <a:p/>
           <a:p>
             <a:r>
-              <a:t>![Select the Lakehouse from jdi-training-manual and add it to the Map.](images/training/manual/27-map-lakehouse.png)</a:t>
+              <a:t>![Select the Lakehouse from fabric-training-manual and add it to the Map.](images/training/manual/27-map-lakehouse.png)</a:t>
             </a:r>
           </a:p>
           <a:p/>
@@ -4697,7 +4697,7 @@
           <a:p/>
           <a:p>
             <a:r>
-              <a:t>![Select the Lakehouse from jdi-training-manual and add it to the Map.](images/training/manual/27-map-lakehouse.png)</a:t>
+              <a:t>![Select the Lakehouse from fabric-training-manual and add it to the Map.](images/training/manual/27-map-lakehouse.png)</a:t>
             </a:r>
           </a:p>
           <a:p/>
@@ -4827,7 +4827,7 @@
           </a:p>
           <a:p>
             <a:r>
-              <a:t>3. Select **Workspaces** &gt; **New workspace** and enter `jdi-training-manual`.</a:t>
+              <a:t>3. Select **Workspaces** &gt; **New workspace** and enter `fabric-training-manual`.</a:t>
             </a:r>
           </a:p>
           <a:p>
@@ -4847,7 +4847,7 @@
           </a:p>
           <a:p>
             <a:r>
-              <a:t>   the older `jdi-training` reference workspace and its items.</a:t>
+              <a:t>   the older `fabric-training` reference workspace and its items.</a:t>
             </a:r>
           </a:p>
           <a:p>
@@ -4908,7 +4908,7 @@
           <a:p/>
           <a:p>
             <a:r>
-              <a:t>![Name the facilitator workspace jdi-training-manual and open Advanced.](images/training/manual/01-workspace-create.png)</a:t>
+              <a:t>![Name the facilitator workspace fabric-training-manual and open Advanced.](images/training/manual/01-workspace-create.png)</a:t>
             </a:r>
           </a:p>
           <a:p/>
@@ -5059,7 +5059,7 @@
           <a:p/>
           <a:p>
             <a:r>
-              <a:t>![Select the Lakehouse from jdi-training-manual and add it to the Map.](images/training/manual/27-map-lakehouse.png)</a:t>
+              <a:t>![Select the Lakehouse from fabric-training-manual and add it to the Map.](images/training/manual/27-map-lakehouse.png)</a:t>
             </a:r>
           </a:p>
           <a:p/>
@@ -7371,7 +7371,7 @@
           <a:p/>
           <a:p>
             <a:r>
-              <a:t>1. Open the Contoso workspace `jdi-training-manual`. Confirm its assigned</a:t>
+              <a:t>1. Open the Contoso workspace `fabric-training-manual`. Confirm its assigned</a:t>
             </a:r>
           </a:p>
           <a:p>
@@ -9494,12 +9494,12 @@
           </a:p>
           <a:p>
             <a:r>
-              <a:t>2. Select **Workspaces** &gt; **jdi-training-manual**. Check the workspace name.</a:t>
-            </a:r>
-          </a:p>
-          <a:p>
-            <a:r>
-              <a:t>   Leave the older `jdi-training` reference workspace and its results unchanged.</a:t>
+              <a:t>2. Select **Workspaces** &gt; **fabric-training-manual**. Check the workspace name.</a:t>
+            </a:r>
+          </a:p>
+          <a:p>
+            <a:r>
+              <a:t>   Leave the older `fabric-training` reference workspace and its results unchanged.</a:t>
             </a:r>
           </a:p>
           <a:p>
@@ -13053,7 +13053,7 @@
               </a:defRPr>
             </a:pPr>
             <a:r>
-              <a:t>JDI WOODLANDS | MANUAL FABRIC WORKSHOP</a:t>
+              <a:t>WOODLANDS | MANUAL FABRIC WORKSHOP</a:t>
             </a:r>
           </a:p>
         </p:txBody>
@@ -15448,7 +15448,7 @@
               </a:defRPr>
             </a:pPr>
             <a:r>
-              <a:t>Verify Location is jdi-training-manual, not one of the reference workspaces.</a:t>
+              <a:t>Verify Location is fabric-training-manual, not one of the reference workspaces.</a:t>
             </a:r>
           </a:p>
         </p:txBody>
@@ -17986,7 +17986,7 @@
               </a:defRPr>
             </a:pPr>
             <a:r>
-              <a:t>Use jdi-training-manual for this rehearsal.</a:t>
+              <a:t>Use fabric-training-manual for this rehearsal.</a:t>
             </a:r>
           </a:p>
         </p:txBody>
@@ -22278,7 +22278,7 @@
               </a:defRPr>
             </a:pPr>
             <a:r>
-              <a:t>Confirm Location is jdi-training-manual.</a:t>
+              <a:t>Confirm Location is fabric-training-manual.</a:t>
             </a:r>
           </a:p>
         </p:txBody>
